--- a/Tokosavorum_2.pptx
+++ b/Tokosavorum_2.pptx
@@ -14,12 +14,13 @@
     <p:sldId id="259" r:id="rId8"/>
     <p:sldId id="260" r:id="rId9"/>
     <p:sldId id="262" r:id="rId10"/>
-    <p:sldId id="266" r:id="rId11"/>
-    <p:sldId id="267" r:id="rId12"/>
-    <p:sldId id="270" r:id="rId13"/>
-    <p:sldId id="265" r:id="rId14"/>
-    <p:sldId id="268" r:id="rId15"/>
-    <p:sldId id="263" r:id="rId16"/>
+    <p:sldId id="271" r:id="rId11"/>
+    <p:sldId id="266" r:id="rId12"/>
+    <p:sldId id="267" r:id="rId13"/>
+    <p:sldId id="270" r:id="rId14"/>
+    <p:sldId id="265" r:id="rId15"/>
+    <p:sldId id="268" r:id="rId16"/>
+    <p:sldId id="263" r:id="rId17"/>
   </p:sldIdLst>
   <p:sldSz cx="12192000" cy="6858000"/>
   <p:notesSz cx="6858000" cy="9144000"/>
@@ -257,7 +258,7 @@
           <a:p>
             <a:fld id="{26B45A88-84CD-47B4-B068-1CCEBD78BFD4}" type="datetimeFigureOut">
               <a:rPr lang="ru-RU" smtClean="0"/>
-              <a:t>04.03.2026</a:t>
+              <a:t>10.03.2026</a:t>
             </a:fld>
             <a:endParaRPr lang="ru-RU"/>
           </a:p>
@@ -427,7 +428,7 @@
           <a:p>
             <a:fld id="{26B45A88-84CD-47B4-B068-1CCEBD78BFD4}" type="datetimeFigureOut">
               <a:rPr lang="ru-RU" smtClean="0"/>
-              <a:t>04.03.2026</a:t>
+              <a:t>10.03.2026</a:t>
             </a:fld>
             <a:endParaRPr lang="ru-RU"/>
           </a:p>
@@ -607,7 +608,7 @@
           <a:p>
             <a:fld id="{26B45A88-84CD-47B4-B068-1CCEBD78BFD4}" type="datetimeFigureOut">
               <a:rPr lang="ru-RU" smtClean="0"/>
-              <a:t>04.03.2026</a:t>
+              <a:t>10.03.2026</a:t>
             </a:fld>
             <a:endParaRPr lang="ru-RU"/>
           </a:p>
@@ -777,7 +778,7 @@
           <a:p>
             <a:fld id="{26B45A88-84CD-47B4-B068-1CCEBD78BFD4}" type="datetimeFigureOut">
               <a:rPr lang="ru-RU" smtClean="0"/>
-              <a:t>04.03.2026</a:t>
+              <a:t>10.03.2026</a:t>
             </a:fld>
             <a:endParaRPr lang="ru-RU"/>
           </a:p>
@@ -1023,7 +1024,7 @@
           <a:p>
             <a:fld id="{26B45A88-84CD-47B4-B068-1CCEBD78BFD4}" type="datetimeFigureOut">
               <a:rPr lang="ru-RU" smtClean="0"/>
-              <a:t>04.03.2026</a:t>
+              <a:t>10.03.2026</a:t>
             </a:fld>
             <a:endParaRPr lang="ru-RU"/>
           </a:p>
@@ -1255,7 +1256,7 @@
           <a:p>
             <a:fld id="{26B45A88-84CD-47B4-B068-1CCEBD78BFD4}" type="datetimeFigureOut">
               <a:rPr lang="ru-RU" smtClean="0"/>
-              <a:t>04.03.2026</a:t>
+              <a:t>10.03.2026</a:t>
             </a:fld>
             <a:endParaRPr lang="ru-RU"/>
           </a:p>
@@ -1622,7 +1623,7 @@
           <a:p>
             <a:fld id="{26B45A88-84CD-47B4-B068-1CCEBD78BFD4}" type="datetimeFigureOut">
               <a:rPr lang="ru-RU" smtClean="0"/>
-              <a:t>04.03.2026</a:t>
+              <a:t>10.03.2026</a:t>
             </a:fld>
             <a:endParaRPr lang="ru-RU"/>
           </a:p>
@@ -1740,7 +1741,7 @@
           <a:p>
             <a:fld id="{26B45A88-84CD-47B4-B068-1CCEBD78BFD4}" type="datetimeFigureOut">
               <a:rPr lang="ru-RU" smtClean="0"/>
-              <a:t>04.03.2026</a:t>
+              <a:t>10.03.2026</a:t>
             </a:fld>
             <a:endParaRPr lang="ru-RU"/>
           </a:p>
@@ -1835,7 +1836,7 @@
           <a:p>
             <a:fld id="{26B45A88-84CD-47B4-B068-1CCEBD78BFD4}" type="datetimeFigureOut">
               <a:rPr lang="ru-RU" smtClean="0"/>
-              <a:t>04.03.2026</a:t>
+              <a:t>10.03.2026</a:t>
             </a:fld>
             <a:endParaRPr lang="ru-RU"/>
           </a:p>
@@ -2112,7 +2113,7 @@
           <a:p>
             <a:fld id="{26B45A88-84CD-47B4-B068-1CCEBD78BFD4}" type="datetimeFigureOut">
               <a:rPr lang="ru-RU" smtClean="0"/>
-              <a:t>04.03.2026</a:t>
+              <a:t>10.03.2026</a:t>
             </a:fld>
             <a:endParaRPr lang="ru-RU"/>
           </a:p>
@@ -2365,7 +2366,7 @@
           <a:p>
             <a:fld id="{26B45A88-84CD-47B4-B068-1CCEBD78BFD4}" type="datetimeFigureOut">
               <a:rPr lang="ru-RU" smtClean="0"/>
-              <a:t>04.03.2026</a:t>
+              <a:t>10.03.2026</a:t>
             </a:fld>
             <a:endParaRPr lang="ru-RU"/>
           </a:p>
@@ -2578,7 +2579,7 @@
           <a:p>
             <a:fld id="{26B45A88-84CD-47B4-B068-1CCEBD78BFD4}" type="datetimeFigureOut">
               <a:rPr lang="ru-RU" smtClean="0"/>
-              <a:t>04.03.2026</a:t>
+              <a:t>10.03.2026</a:t>
             </a:fld>
             <a:endParaRPr lang="ru-RU"/>
           </a:p>
@@ -3152,6 +3153,158 @@
         </p:nvSpPr>
         <p:spPr>
           <a:xfrm>
+            <a:off x="838200" y="418392"/>
+            <a:ext cx="10515600" cy="780094"/>
+          </a:xfrm>
+        </p:spPr>
+        <p:txBody>
+          <a:bodyPr/>
+          <a:lstStyle/>
+          <a:p>
+            <a:pPr algn="ctr"/>
+            <a:r>
+              <a:rPr lang="hy-AM" b="1" dirty="0" smtClean="0"/>
+              <a:t>Ռեգրեսսիոն Մոդելի Ընտրություն</a:t>
+            </a:r>
+            <a:endParaRPr lang="ru-RU" b="1" dirty="0"/>
+          </a:p>
+        </p:txBody>
+      </p:sp>
+      <p:sp>
+        <p:nvSpPr>
+          <p:cNvPr id="3" name="Content Placeholder 2"/>
+          <p:cNvSpPr>
+            <a:spLocks noGrp="1"/>
+          </p:cNvSpPr>
+          <p:nvPr>
+            <p:ph idx="1"/>
+          </p:nvPr>
+        </p:nvSpPr>
+        <p:spPr>
+          <a:xfrm>
+            <a:off x="838200" y="1603684"/>
+            <a:ext cx="10515600" cy="4351338"/>
+          </a:xfrm>
+        </p:spPr>
+        <p:txBody>
+          <a:bodyPr/>
+          <a:lstStyle/>
+          <a:p>
+            <a:pPr marL="0" indent="0" algn="just">
+              <a:buNone/>
+            </a:pPr>
+            <a:r>
+              <a:rPr lang="en-US" dirty="0" smtClean="0"/>
+              <a:t>PD </a:t>
+            </a:r>
+            <a:r>
+              <a:rPr lang="hy-AM" dirty="0" smtClean="0"/>
+              <a:t>գործակցի հաշվելու համար մեզ անհրաժեշտ է մեքենայական ուսուցման մոդել, որը հիմնվելու է մեր ունեցած պատմական տվյալների հիման վրա, որն էլ միաժամանակ պետք է համապատասխանի ՖՀՄՍ 9 պահանջներին, դրանք են՝</a:t>
+            </a:r>
+          </a:p>
+          <a:p>
+            <a:pPr algn="just"/>
+            <a:r>
+              <a:rPr lang="en-US" dirty="0"/>
+              <a:t>PD ∈ [0,1</a:t>
+            </a:r>
+            <a:r>
+              <a:rPr lang="en-US" dirty="0" smtClean="0"/>
+              <a:t>]</a:t>
+            </a:r>
+            <a:endParaRPr lang="hy-AM" dirty="0" smtClean="0"/>
+          </a:p>
+          <a:p>
+            <a:pPr algn="just"/>
+            <a:r>
+              <a:rPr lang="hy-AM" dirty="0"/>
+              <a:t>Մոդելի բացատրելիություն և </a:t>
+            </a:r>
+            <a:r>
+              <a:rPr lang="hy-AM" dirty="0" smtClean="0"/>
+              <a:t>թափանցիկություն</a:t>
+            </a:r>
+          </a:p>
+          <a:p>
+            <a:pPr algn="just"/>
+            <a:r>
+              <a:rPr lang="hy-AM" dirty="0" smtClean="0"/>
+              <a:t>Կայունություն</a:t>
+            </a:r>
+            <a:endParaRPr lang="en-US" dirty="0" smtClean="0"/>
+          </a:p>
+          <a:p>
+            <a:pPr algn="just"/>
+            <a:r>
+              <a:rPr lang="hy-AM" dirty="0"/>
+              <a:t>Սահմանափակ </a:t>
+            </a:r>
+            <a:r>
+              <a:rPr lang="hy-AM" dirty="0" smtClean="0"/>
+              <a:t>տվյալներով </a:t>
+            </a:r>
+            <a:r>
+              <a:rPr lang="hy-AM" dirty="0"/>
+              <a:t>աշխատելու </a:t>
+            </a:r>
+            <a:r>
+              <a:rPr lang="hy-AM" dirty="0" smtClean="0"/>
+              <a:t>ունակություն</a:t>
+            </a:r>
+            <a:endParaRPr lang="en-US" dirty="0" smtClean="0"/>
+          </a:p>
+          <a:p>
+            <a:pPr algn="just"/>
+            <a:r>
+              <a:rPr lang="hy-AM" dirty="0"/>
+              <a:t>Հեշտ իրականացում և մատչելի սպասարկում</a:t>
+            </a:r>
+            <a:endParaRPr lang="ru-RU" dirty="0"/>
+          </a:p>
+        </p:txBody>
+      </p:sp>
+    </p:spTree>
+    <p:extLst>
+      <p:ext uri="{BB962C8B-B14F-4D97-AF65-F5344CB8AC3E}">
+        <p14:creationId xmlns:p14="http://schemas.microsoft.com/office/powerpoint/2010/main" val="783909574"/>
+      </p:ext>
+    </p:extLst>
+  </p:cSld>
+  <p:clrMapOvr>
+    <a:masterClrMapping/>
+  </p:clrMapOvr>
+</p:sld>
+</file>
+
+<file path=ppt/slides/slide11.xml><?xml version="1.0" encoding="utf-8"?>
+<p:sld xmlns:a="http://schemas.openxmlformats.org/drawingml/2006/main" xmlns:r="http://schemas.openxmlformats.org/officeDocument/2006/relationships" xmlns:p="http://schemas.openxmlformats.org/presentationml/2006/main">
+  <p:cSld>
+    <p:spTree>
+      <p:nvGrpSpPr>
+        <p:cNvPr id="1" name=""/>
+        <p:cNvGrpSpPr/>
+        <p:nvPr/>
+      </p:nvGrpSpPr>
+      <p:grpSpPr>
+        <a:xfrm>
+          <a:off x="0" y="0"/>
+          <a:ext cx="0" cy="0"/>
+          <a:chOff x="0" y="0"/>
+          <a:chExt cx="0" cy="0"/>
+        </a:xfrm>
+      </p:grpSpPr>
+      <p:sp>
+        <p:nvSpPr>
+          <p:cNvPr id="2" name="Title 1"/>
+          <p:cNvSpPr>
+            <a:spLocks noGrp="1"/>
+          </p:cNvSpPr>
+          <p:nvPr>
+            <p:ph type="title"/>
+          </p:nvPr>
+        </p:nvSpPr>
+        <p:spPr>
+          <a:xfrm>
             <a:off x="776055" y="461639"/>
             <a:ext cx="10515600" cy="846169"/>
           </a:xfrm>
@@ -3181,8 +3334,8 @@
           </a:p>
         </p:txBody>
       </p:sp>
-      <mc:AlternateContent xmlns:mc="http://schemas.openxmlformats.org/markup-compatibility/2006">
-        <mc:Choice xmlns:a14="http://schemas.microsoft.com/office/drawing/2010/main" Requires="a14">
+      <mc:AlternateContent xmlns:mc="http://schemas.openxmlformats.org/markup-compatibility/2006" xmlns:a14="http://schemas.microsoft.com/office/drawing/2010/main">
+        <mc:Choice Requires="a14">
           <p:sp>
             <p:nvSpPr>
               <p:cNvPr id="3" name="Content Placeholder 2"/>
@@ -3481,7 +3634,7 @@
             </p:txBody>
           </p:sp>
         </mc:Choice>
-        <mc:Fallback>
+        <mc:Fallback xmlns="">
           <p:sp>
             <p:nvSpPr>
               <p:cNvPr id="3" name="Content Placeholder 2"/>
@@ -3573,7 +3726,7 @@
 </p:sld>
 </file>
 
-<file path=ppt/slides/slide11.xml><?xml version="1.0" encoding="utf-8"?>
+<file path=ppt/slides/slide12.xml><?xml version="1.0" encoding="utf-8"?>
 <p:sld xmlns:a="http://schemas.openxmlformats.org/drawingml/2006/main" xmlns:r="http://schemas.openxmlformats.org/officeDocument/2006/relationships" xmlns:p="http://schemas.openxmlformats.org/presentationml/2006/main">
   <p:cSld>
     <p:spTree>
@@ -3787,7 +3940,7 @@
 </p:sld>
 </file>
 
-<file path=ppt/slides/slide12.xml><?xml version="1.0" encoding="utf-8"?>
+<file path=ppt/slides/slide13.xml><?xml version="1.0" encoding="utf-8"?>
 <p:sld xmlns:a="http://schemas.openxmlformats.org/drawingml/2006/main" xmlns:r="http://schemas.openxmlformats.org/officeDocument/2006/relationships" xmlns:p="http://schemas.openxmlformats.org/presentationml/2006/main">
   <p:cSld>
     <p:spTree>
@@ -3831,18 +3984,14 @@
             </a:r>
             <a:r>
               <a:rPr lang="hy-AM" dirty="0" smtClean="0"/>
-              <a:t> </a:t>
-            </a:r>
-            <a:r>
-              <a:rPr lang="hy-AM" dirty="0" smtClean="0"/>
-              <a:t>Գործակցի Բանաձևը</a:t>
+              <a:t> Գործակցի Բանաձևը</a:t>
             </a:r>
             <a:endParaRPr lang="ru-RU" dirty="0"/>
           </a:p>
         </p:txBody>
       </p:sp>
-      <mc:AlternateContent xmlns:mc="http://schemas.openxmlformats.org/markup-compatibility/2006">
-        <mc:Choice xmlns:a14="http://schemas.microsoft.com/office/drawing/2010/main" Requires="a14">
+      <mc:AlternateContent xmlns:mc="http://schemas.openxmlformats.org/markup-compatibility/2006" xmlns:a14="http://schemas.microsoft.com/office/drawing/2010/main">
+        <mc:Choice Requires="a14">
           <p:sp>
             <p:nvSpPr>
               <p:cNvPr id="5" name="Content Placeholder 2"/>
@@ -3875,71 +4024,105 @@
                     </m:oMathParaPr>
                     <m:oMath xmlns:m="http://schemas.openxmlformats.org/officeDocument/2006/math">
                       <m:r>
-                        <a:rPr lang="ru-RU" b="0" i="1"/>
+                        <a:rPr lang="ru-RU" b="0" i="1">
+                          <a:latin typeface="Cambria Math" panose="02040503050406030204" pitchFamily="18" charset="0"/>
+                        </a:rPr>
                         <m:t>𝐿𝐺𝐷</m:t>
                       </m:r>
                       <m:r>
-                        <a:rPr lang="ru-RU" b="0" i="1"/>
+                        <a:rPr lang="ru-RU" b="0" i="1">
+                          <a:latin typeface="Cambria Math" panose="02040503050406030204" pitchFamily="18" charset="0"/>
+                        </a:rPr>
                         <m:t> = 1 − [ </m:t>
                       </m:r>
                       <m:r>
-                        <a:rPr lang="ru-RU" b="0" i="1"/>
+                        <a:rPr lang="ru-RU" b="0" i="1">
+                          <a:latin typeface="Cambria Math" panose="02040503050406030204" pitchFamily="18" charset="0"/>
+                        </a:rPr>
                         <m:t>𝛴</m:t>
                       </m:r>
                       <m:r>
-                        <a:rPr lang="ru-RU" b="0" i="1"/>
+                        <a:rPr lang="ru-RU" b="0" i="1">
+                          <a:latin typeface="Cambria Math" panose="02040503050406030204" pitchFamily="18" charset="0"/>
+                        </a:rPr>
                         <m:t> (</m:t>
                       </m:r>
                       <m:r>
-                        <a:rPr lang="ru-RU" b="0" i="1"/>
+                        <a:rPr lang="ru-RU" b="0" i="1">
+                          <a:latin typeface="Cambria Math" panose="02040503050406030204" pitchFamily="18" charset="0"/>
+                        </a:rPr>
                         <m:t>𝐶𝑎𝑠h</m:t>
                       </m:r>
                       <m:r>
-                        <a:rPr lang="ru-RU" b="0" i="1"/>
+                        <a:rPr lang="ru-RU" b="0" i="1">
+                          <a:latin typeface="Cambria Math" panose="02040503050406030204" pitchFamily="18" charset="0"/>
+                        </a:rPr>
                         <m:t>_</m:t>
                       </m:r>
                       <m:r>
-                        <a:rPr lang="ru-RU" b="0" i="1"/>
+                        <a:rPr lang="ru-RU" b="0" i="1">
+                          <a:latin typeface="Cambria Math" panose="02040503050406030204" pitchFamily="18" charset="0"/>
+                        </a:rPr>
                         <m:t>𝑡</m:t>
                       </m:r>
                       <m:r>
-                        <a:rPr lang="ru-RU" b="0" i="1"/>
+                        <a:rPr lang="ru-RU" b="0" i="1">
+                          <a:latin typeface="Cambria Math" panose="02040503050406030204" pitchFamily="18" charset="0"/>
+                        </a:rPr>
                         <m:t> − </m:t>
                       </m:r>
                       <m:r>
-                        <a:rPr lang="ru-RU" b="0" i="1"/>
+                        <a:rPr lang="ru-RU" b="0" i="1">
+                          <a:latin typeface="Cambria Math" panose="02040503050406030204" pitchFamily="18" charset="0"/>
+                        </a:rPr>
                         <m:t>𝐶𝑜𝑠𝑡</m:t>
                       </m:r>
                       <m:r>
-                        <a:rPr lang="ru-RU" b="0" i="1"/>
+                        <a:rPr lang="ru-RU" b="0" i="1">
+                          <a:latin typeface="Cambria Math" panose="02040503050406030204" pitchFamily="18" charset="0"/>
+                        </a:rPr>
                         <m:t>_</m:t>
                       </m:r>
                       <m:r>
-                        <a:rPr lang="ru-RU" b="0" i="1"/>
+                        <a:rPr lang="ru-RU" b="0" i="1">
+                          <a:latin typeface="Cambria Math" panose="02040503050406030204" pitchFamily="18" charset="0"/>
+                        </a:rPr>
                         <m:t>𝑡</m:t>
                       </m:r>
                       <m:r>
-                        <a:rPr lang="ru-RU" b="0" i="1"/>
+                        <a:rPr lang="ru-RU" b="0" i="1">
+                          <a:latin typeface="Cambria Math" panose="02040503050406030204" pitchFamily="18" charset="0"/>
+                        </a:rPr>
                         <m:t>) / (1 + </m:t>
                       </m:r>
                       <m:r>
-                        <a:rPr lang="ru-RU" b="0" i="1"/>
+                        <a:rPr lang="ru-RU" b="0" i="1">
+                          <a:latin typeface="Cambria Math" panose="02040503050406030204" pitchFamily="18" charset="0"/>
+                        </a:rPr>
                         <m:t>𝑟</m:t>
                       </m:r>
                       <m:r>
-                        <a:rPr lang="ru-RU" b="0" i="1"/>
+                        <a:rPr lang="ru-RU" b="0" i="1">
+                          <a:latin typeface="Cambria Math" panose="02040503050406030204" pitchFamily="18" charset="0"/>
+                        </a:rPr>
                         <m:t>)^</m:t>
                       </m:r>
                       <m:r>
-                        <a:rPr lang="ru-RU" b="0" i="1"/>
+                        <a:rPr lang="ru-RU" b="0" i="1">
+                          <a:latin typeface="Cambria Math" panose="02040503050406030204" pitchFamily="18" charset="0"/>
+                        </a:rPr>
                         <m:t>𝑡</m:t>
                       </m:r>
                       <m:r>
-                        <a:rPr lang="ru-RU" b="0" i="1"/>
+                        <a:rPr lang="ru-RU" b="0" i="1">
+                          <a:latin typeface="Cambria Math" panose="02040503050406030204" pitchFamily="18" charset="0"/>
+                        </a:rPr>
                         <m:t> ] / </m:t>
                       </m:r>
                       <m:r>
-                        <a:rPr lang="ru-RU" b="0" i="1"/>
+                        <a:rPr lang="ru-RU" b="0" i="1">
+                          <a:latin typeface="Cambria Math" panose="02040503050406030204" pitchFamily="18" charset="0"/>
+                        </a:rPr>
                         <m:t>𝐸𝐴𝐷</m:t>
                       </m:r>
                     </m:oMath>
@@ -3950,7 +4133,7 @@
             </p:txBody>
           </p:sp>
         </mc:Choice>
-        <mc:Fallback>
+        <mc:Fallback xmlns="">
           <p:sp>
             <p:nvSpPr>
               <p:cNvPr id="5" name="Content Placeholder 2"/>
@@ -4001,7 +4184,7 @@
 </p:sld>
 </file>
 
-<file path=ppt/slides/slide13.xml><?xml version="1.0" encoding="utf-8"?>
+<file path=ppt/slides/slide14.xml><?xml version="1.0" encoding="utf-8"?>
 <p:sld xmlns:a="http://schemas.openxmlformats.org/drawingml/2006/main" xmlns:r="http://schemas.openxmlformats.org/officeDocument/2006/relationships" xmlns:p="http://schemas.openxmlformats.org/presentationml/2006/main">
   <p:cSld>
     <p:spTree>
@@ -4191,7 +4374,7 @@
 </p:sld>
 </file>
 
-<file path=ppt/slides/slide14.xml><?xml version="1.0" encoding="utf-8"?>
+<file path=ppt/slides/slide15.xml><?xml version="1.0" encoding="utf-8"?>
 <p:sld xmlns:a="http://schemas.openxmlformats.org/drawingml/2006/main" xmlns:r="http://schemas.openxmlformats.org/officeDocument/2006/relationships" xmlns:p="http://schemas.openxmlformats.org/presentationml/2006/main">
   <p:cSld>
     <p:spTree>
@@ -4278,7 +4461,7 @@
 </p:sld>
 </file>
 
-<file path=ppt/slides/slide15.xml><?xml version="1.0" encoding="utf-8"?>
+<file path=ppt/slides/slide16.xml><?xml version="1.0" encoding="utf-8"?>
 <p:sld xmlns:a="http://schemas.openxmlformats.org/drawingml/2006/main" xmlns:r="http://schemas.openxmlformats.org/officeDocument/2006/relationships" xmlns:p="http://schemas.openxmlformats.org/presentationml/2006/main">
   <p:cSld>
     <p:spTree>

--- a/Tokosavorum_2.pptx
+++ b/Tokosavorum_2.pptx
@@ -16,11 +16,12 @@
     <p:sldId id="262" r:id="rId10"/>
     <p:sldId id="271" r:id="rId11"/>
     <p:sldId id="266" r:id="rId12"/>
-    <p:sldId id="267" r:id="rId13"/>
-    <p:sldId id="270" r:id="rId14"/>
-    <p:sldId id="265" r:id="rId15"/>
-    <p:sldId id="268" r:id="rId16"/>
-    <p:sldId id="263" r:id="rId17"/>
+    <p:sldId id="272" r:id="rId13"/>
+    <p:sldId id="267" r:id="rId14"/>
+    <p:sldId id="270" r:id="rId15"/>
+    <p:sldId id="265" r:id="rId16"/>
+    <p:sldId id="268" r:id="rId17"/>
+    <p:sldId id="263" r:id="rId18"/>
   </p:sldIdLst>
   <p:sldSz cx="12192000" cy="6858000"/>
   <p:notesSz cx="6858000" cy="9144000"/>
@@ -2997,7 +2998,7 @@
         <p:spPr>
           <a:xfrm>
             <a:off x="778276" y="634091"/>
-            <a:ext cx="10635448" cy="3485148"/>
+            <a:ext cx="10635448" cy="3087677"/>
           </a:xfrm>
         </p:spPr>
         <p:txBody>
@@ -3305,7 +3306,7 @@
         </p:nvSpPr>
         <p:spPr>
           <a:xfrm>
-            <a:off x="776055" y="461639"/>
+            <a:off x="792097" y="579336"/>
             <a:ext cx="10515600" cy="846169"/>
           </a:xfrm>
         </p:spPr>
@@ -3334,8 +3335,8 @@
           </a:p>
         </p:txBody>
       </p:sp>
-      <mc:AlternateContent xmlns:mc="http://schemas.openxmlformats.org/markup-compatibility/2006" xmlns:a14="http://schemas.microsoft.com/office/drawing/2010/main">
-        <mc:Choice Requires="a14">
+      <mc:AlternateContent xmlns:mc="http://schemas.openxmlformats.org/markup-compatibility/2006">
+        <mc:Choice xmlns:a14="http://schemas.microsoft.com/office/drawing/2010/main" Requires="a14">
           <p:sp>
             <p:nvSpPr>
               <p:cNvPr id="3" name="Content Placeholder 2"/>
@@ -3348,20 +3349,20 @@
             </p:nvSpPr>
             <p:spPr>
               <a:xfrm>
-                <a:off x="1959005" y="1161130"/>
-                <a:ext cx="8149701" cy="970799"/>
+                <a:off x="1727951" y="4176197"/>
+                <a:ext cx="8643892" cy="1042737"/>
               </a:xfrm>
             </p:spPr>
             <p:txBody>
               <a:bodyPr>
-                <a:normAutofit/>
+                <a:noAutofit/>
               </a:bodyPr>
               <a:lstStyle/>
               <a:p>
                 <a:pPr marL="0" indent="0" algn="ctr">
                   <a:buNone/>
                 </a:pPr>
-                <a:endParaRPr lang="ru-RU" dirty="0"/>
+                <a:endParaRPr lang="ru-RU" sz="3200" dirty="0"/>
               </a:p>
               <a:p>
                 <a:pPr marL="0" indent="0" algn="ctr">
@@ -3374,7 +3375,7 @@
                     </m:oMathParaPr>
                     <m:oMath xmlns:m="http://schemas.openxmlformats.org/officeDocument/2006/math">
                       <m:r>
-                        <a:rPr lang="hy-AM" i="1">
+                        <a:rPr lang="hy-AM" sz="3200" i="1">
                           <a:latin typeface="Cambria Math" panose="02040503050406030204" pitchFamily="18" charset="0"/>
                         </a:rPr>
                         <m:t>𝑃</m:t>
@@ -3382,20 +3383,20 @@
                       <m:d>
                         <m:dPr>
                           <m:ctrlPr>
-                            <a:rPr lang="ru-RU" i="1">
+                            <a:rPr lang="ru-RU" sz="3200" i="1">
                               <a:latin typeface="Cambria Math" panose="02040503050406030204" pitchFamily="18" charset="0"/>
                             </a:rPr>
                           </m:ctrlPr>
                         </m:dPr>
                         <m:e>
                           <m:r>
-                            <a:rPr lang="hy-AM" i="1">
+                            <a:rPr lang="hy-AM" sz="3200" i="1">
                               <a:latin typeface="Cambria Math" panose="02040503050406030204" pitchFamily="18" charset="0"/>
                             </a:rPr>
                             <m:t>𝑦</m:t>
                           </m:r>
                           <m:r>
-                            <a:rPr lang="hy-AM" i="1">
+                            <a:rPr lang="hy-AM" sz="3200" i="1">
                               <a:latin typeface="Cambria Math" panose="02040503050406030204" pitchFamily="18" charset="0"/>
                             </a:rPr>
                             <m:t>=1</m:t>
@@ -3403,7 +3404,7 @@
                         </m:e>
                         <m:e>
                           <m:r>
-                            <a:rPr lang="hy-AM" i="1">
+                            <a:rPr lang="hy-AM" sz="3200" i="1">
                               <a:latin typeface="Cambria Math" panose="02040503050406030204" pitchFamily="18" charset="0"/>
                             </a:rPr>
                             <m:t>𝑋</m:t>
@@ -3411,13 +3412,13 @@
                         </m:e>
                       </m:d>
                       <m:r>
-                        <a:rPr lang="hy-AM" i="1">
+                        <a:rPr lang="hy-AM" sz="3200" i="1">
                           <a:latin typeface="Cambria Math" panose="02040503050406030204" pitchFamily="18" charset="0"/>
                         </a:rPr>
                         <m:t>=</m:t>
                       </m:r>
                       <m:r>
-                        <a:rPr lang="hy-AM" i="1">
+                        <a:rPr lang="hy-AM" sz="3200" i="1">
                           <a:latin typeface="Cambria Math" panose="02040503050406030204" pitchFamily="18" charset="0"/>
                         </a:rPr>
                         <m:t>𝜎</m:t>
@@ -3425,7 +3426,7 @@
                       <m:d>
                         <m:dPr>
                           <m:ctrlPr>
-                            <a:rPr lang="ru-RU" i="1">
+                            <a:rPr lang="ru-RU" sz="3200" i="1">
                               <a:latin typeface="Cambria Math" panose="02040503050406030204" pitchFamily="18" charset="0"/>
                             </a:rPr>
                           </m:ctrlPr>
@@ -3434,14 +3435,14 @@
                           <m:sSub>
                             <m:sSubPr>
                               <m:ctrlPr>
-                                <a:rPr lang="ru-RU" i="1">
+                                <a:rPr lang="ru-RU" sz="3200" i="1">
                                   <a:latin typeface="Cambria Math" panose="02040503050406030204" pitchFamily="18" charset="0"/>
                                 </a:rPr>
                               </m:ctrlPr>
                             </m:sSubPr>
                             <m:e>
                               <m:r>
-                                <a:rPr lang="hy-AM" i="1">
+                                <a:rPr lang="hy-AM" sz="3200" i="1">
                                   <a:latin typeface="Cambria Math" panose="02040503050406030204" pitchFamily="18" charset="0"/>
                                 </a:rPr>
                                 <m:t>𝛽</m:t>
@@ -3449,7 +3450,7 @@
                             </m:e>
                             <m:sub>
                               <m:r>
-                                <a:rPr lang="hy-AM" i="1">
+                                <a:rPr lang="hy-AM" sz="3200" i="1">
                                   <a:latin typeface="Cambria Math" panose="02040503050406030204" pitchFamily="18" charset="0"/>
                                 </a:rPr>
                                 <m:t>0</m:t>
@@ -3457,7 +3458,7 @@
                             </m:sub>
                           </m:sSub>
                           <m:r>
-                            <a:rPr lang="hy-AM" i="1">
+                            <a:rPr lang="hy-AM" sz="3200" i="1">
                               <a:latin typeface="Cambria Math" panose="02040503050406030204" pitchFamily="18" charset="0"/>
                             </a:rPr>
                             <m:t>+</m:t>
@@ -3465,14 +3466,14 @@
                           <m:sSub>
                             <m:sSubPr>
                               <m:ctrlPr>
-                                <a:rPr lang="ru-RU" i="1">
+                                <a:rPr lang="ru-RU" sz="3200" i="1">
                                   <a:latin typeface="Cambria Math" panose="02040503050406030204" pitchFamily="18" charset="0"/>
                                 </a:rPr>
                               </m:ctrlPr>
                             </m:sSubPr>
                             <m:e>
                               <m:r>
-                                <a:rPr lang="hy-AM" i="1">
+                                <a:rPr lang="hy-AM" sz="3200" i="1">
                                   <a:latin typeface="Cambria Math" panose="02040503050406030204" pitchFamily="18" charset="0"/>
                                 </a:rPr>
                                 <m:t>𝛽</m:t>
@@ -3480,7 +3481,7 @@
                             </m:e>
                             <m:sub>
                               <m:r>
-                                <a:rPr lang="hy-AM" i="1">
+                                <a:rPr lang="hy-AM" sz="3200" i="1">
                                   <a:latin typeface="Cambria Math" panose="02040503050406030204" pitchFamily="18" charset="0"/>
                                 </a:rPr>
                                 <m:t>1</m:t>
@@ -3490,14 +3491,14 @@
                           <m:sSub>
                             <m:sSubPr>
                               <m:ctrlPr>
-                                <a:rPr lang="ru-RU" i="1">
+                                <a:rPr lang="ru-RU" sz="3200" i="1">
                                   <a:latin typeface="Cambria Math" panose="02040503050406030204" pitchFamily="18" charset="0"/>
                                 </a:rPr>
                               </m:ctrlPr>
                             </m:sSubPr>
                             <m:e>
                               <m:r>
-                                <a:rPr lang="hy-AM" i="1">
+                                <a:rPr lang="hy-AM" sz="3200" i="1">
                                   <a:latin typeface="Cambria Math" panose="02040503050406030204" pitchFamily="18" charset="0"/>
                                 </a:rPr>
                                 <m:t>𝑥</m:t>
@@ -3505,7 +3506,7 @@
                             </m:e>
                             <m:sub>
                               <m:r>
-                                <a:rPr lang="hy-AM" i="1">
+                                <a:rPr lang="hy-AM" sz="3200" i="1">
                                   <a:latin typeface="Cambria Math" panose="02040503050406030204" pitchFamily="18" charset="0"/>
                                 </a:rPr>
                                 <m:t>1</m:t>
@@ -3513,7 +3514,7 @@
                             </m:sub>
                           </m:sSub>
                           <m:r>
-                            <a:rPr lang="hy-AM" i="1">
+                            <a:rPr lang="hy-AM" sz="3200" i="1">
                               <a:latin typeface="Cambria Math" panose="02040503050406030204" pitchFamily="18" charset="0"/>
                             </a:rPr>
                             <m:t>+</m:t>
@@ -3521,14 +3522,14 @@
                           <m:sSub>
                             <m:sSubPr>
                               <m:ctrlPr>
-                                <a:rPr lang="ru-RU" i="1">
+                                <a:rPr lang="ru-RU" sz="3200" i="1">
                                   <a:latin typeface="Cambria Math" panose="02040503050406030204" pitchFamily="18" charset="0"/>
                                 </a:rPr>
                               </m:ctrlPr>
                             </m:sSubPr>
                             <m:e>
                               <m:r>
-                                <a:rPr lang="hy-AM" i="1">
+                                <a:rPr lang="hy-AM" sz="3200" i="1">
                                   <a:latin typeface="Cambria Math" panose="02040503050406030204" pitchFamily="18" charset="0"/>
                                 </a:rPr>
                                 <m:t>𝛽</m:t>
@@ -3536,7 +3537,7 @@
                             </m:e>
                             <m:sub>
                               <m:r>
-                                <a:rPr lang="hy-AM" i="1">
+                                <a:rPr lang="hy-AM" sz="3200" i="1">
                                   <a:latin typeface="Cambria Math" panose="02040503050406030204" pitchFamily="18" charset="0"/>
                                 </a:rPr>
                                 <m:t>2</m:t>
@@ -3546,14 +3547,14 @@
                           <m:sSub>
                             <m:sSubPr>
                               <m:ctrlPr>
-                                <a:rPr lang="ru-RU" i="1">
+                                <a:rPr lang="ru-RU" sz="3200" i="1">
                                   <a:latin typeface="Cambria Math" panose="02040503050406030204" pitchFamily="18" charset="0"/>
                                 </a:rPr>
                               </m:ctrlPr>
                             </m:sSubPr>
                             <m:e>
                               <m:r>
-                                <a:rPr lang="hy-AM" i="1">
+                                <a:rPr lang="hy-AM" sz="3200" i="1">
                                   <a:latin typeface="Cambria Math" panose="02040503050406030204" pitchFamily="18" charset="0"/>
                                 </a:rPr>
                                 <m:t>𝑥</m:t>
@@ -3561,7 +3562,7 @@
                             </m:e>
                             <m:sub>
                               <m:r>
-                                <a:rPr lang="hy-AM" i="1">
+                                <a:rPr lang="hy-AM" sz="3200" i="1">
                                   <a:latin typeface="Cambria Math" panose="02040503050406030204" pitchFamily="18" charset="0"/>
                                 </a:rPr>
                                 <m:t>2</m:t>
@@ -3569,7 +3570,7 @@
                             </m:sub>
                           </m:sSub>
                           <m:r>
-                            <a:rPr lang="hy-AM" i="1">
+                            <a:rPr lang="hy-AM" sz="3200" i="1">
                               <a:latin typeface="Cambria Math" panose="02040503050406030204" pitchFamily="18" charset="0"/>
                             </a:rPr>
                             <m:t>+…+</m:t>
@@ -3577,14 +3578,14 @@
                           <m:sSub>
                             <m:sSubPr>
                               <m:ctrlPr>
-                                <a:rPr lang="ru-RU" i="1">
+                                <a:rPr lang="ru-RU" sz="3200" i="1">
                                   <a:latin typeface="Cambria Math" panose="02040503050406030204" pitchFamily="18" charset="0"/>
                                 </a:rPr>
                               </m:ctrlPr>
                             </m:sSubPr>
                             <m:e>
                               <m:r>
-                                <a:rPr lang="hy-AM" i="1">
+                                <a:rPr lang="hy-AM" sz="3200" i="1">
                                   <a:latin typeface="Cambria Math" panose="02040503050406030204" pitchFamily="18" charset="0"/>
                                 </a:rPr>
                                 <m:t>𝛽</m:t>
@@ -3592,7 +3593,7 @@
                             </m:e>
                             <m:sub>
                               <m:r>
-                                <a:rPr lang="hy-AM" i="1">
+                                <a:rPr lang="hy-AM" sz="3200" i="1">
                                   <a:latin typeface="Cambria Math" panose="02040503050406030204" pitchFamily="18" charset="0"/>
                                 </a:rPr>
                                 <m:t>𝑛</m:t>
@@ -3602,14 +3603,14 @@
                           <m:sSub>
                             <m:sSubPr>
                               <m:ctrlPr>
-                                <a:rPr lang="ru-RU" i="1">
+                                <a:rPr lang="ru-RU" sz="3200" i="1">
                                   <a:latin typeface="Cambria Math" panose="02040503050406030204" pitchFamily="18" charset="0"/>
                                 </a:rPr>
                               </m:ctrlPr>
                             </m:sSubPr>
                             <m:e>
                               <m:r>
-                                <a:rPr lang="hy-AM" i="1">
+                                <a:rPr lang="hy-AM" sz="3200" i="1">
                                   <a:latin typeface="Cambria Math" panose="02040503050406030204" pitchFamily="18" charset="0"/>
                                 </a:rPr>
                                 <m:t>𝑥</m:t>
@@ -3617,7 +3618,7 @@
                             </m:e>
                             <m:sub>
                               <m:r>
-                                <a:rPr lang="hy-AM" i="1">
+                                <a:rPr lang="hy-AM" sz="3200" i="1">
                                   <a:latin typeface="Cambria Math" panose="02040503050406030204" pitchFamily="18" charset="0"/>
                                 </a:rPr>
                                 <m:t>𝑛</m:t>
@@ -3629,12 +3630,12 @@
                     </m:oMath>
                   </m:oMathPara>
                 </a14:m>
-                <a:endParaRPr lang="ru-RU" dirty="0"/>
+                <a:endParaRPr lang="ru-RU" sz="3200" dirty="0"/>
               </a:p>
             </p:txBody>
           </p:sp>
         </mc:Choice>
-        <mc:Fallback xmlns="">
+        <mc:Fallback>
           <p:sp>
             <p:nvSpPr>
               <p:cNvPr id="3" name="Content Placeholder 2"/>
@@ -3647,8 +3648,8 @@
             </p:nvSpPr>
             <p:spPr>
               <a:xfrm>
-                <a:off x="1959005" y="1161130"/>
-                <a:ext cx="8149701" cy="970799"/>
+                <a:off x="1727951" y="4176197"/>
+                <a:ext cx="8643892" cy="1042737"/>
               </a:xfrm>
               <a:blipFill>
                 <a:blip r:embed="rId2"/>
@@ -3672,16 +3673,394 @@
           </p:sp>
         </mc:Fallback>
       </mc:AlternateContent>
+      <mc:AlternateContent xmlns:mc="http://schemas.openxmlformats.org/markup-compatibility/2006">
+        <mc:Choice xmlns:a14="http://schemas.microsoft.com/office/drawing/2010/main" Requires="a14">
+          <p:sp>
+            <p:nvSpPr>
+              <p:cNvPr id="6" name="TextBox 5"/>
+              <p:cNvSpPr txBox="1"/>
+              <p:nvPr/>
+            </p:nvSpPr>
+            <p:spPr>
+              <a:xfrm>
+                <a:off x="2539014" y="1866044"/>
+                <a:ext cx="7297444" cy="584775"/>
+              </a:xfrm>
+              <a:prstGeom prst="rect">
+                <a:avLst/>
+              </a:prstGeom>
+              <a:noFill/>
+            </p:spPr>
+            <p:txBody>
+              <a:bodyPr wrap="square" rtlCol="0">
+                <a:spAutoFit/>
+              </a:bodyPr>
+              <a:lstStyle/>
+              <a:p>
+                <a:pPr/>
+                <a14:m>
+                  <m:oMathPara xmlns:m="http://schemas.openxmlformats.org/officeDocument/2006/math">
+                    <m:oMathParaPr>
+                      <m:jc m:val="centerGroup"/>
+                    </m:oMathParaPr>
+                    <m:oMath xmlns:m="http://schemas.openxmlformats.org/officeDocument/2006/math">
+                      <m:r>
+                        <a:rPr lang="en-US" sz="3200" i="1">
+                          <a:latin typeface="Cambria Math" panose="02040503050406030204" pitchFamily="18" charset="0"/>
+                        </a:rPr>
+                        <m:t>𝑤</m:t>
+                      </m:r>
+                      <m:r>
+                        <a:rPr lang="en-US" sz="3200" i="1">
+                          <a:latin typeface="Cambria Math" panose="02040503050406030204" pitchFamily="18" charset="0"/>
+                        </a:rPr>
+                        <m:t>=</m:t>
+                      </m:r>
+                      <m:r>
+                        <a:rPr lang="en-US" sz="3200" i="1">
+                          <a:latin typeface="Cambria Math" panose="02040503050406030204" pitchFamily="18" charset="0"/>
+                        </a:rPr>
+                        <m:t>𝑤</m:t>
+                      </m:r>
+                      <m:r>
+                        <a:rPr lang="en-US" sz="3200" i="1">
+                          <a:latin typeface="Cambria Math" panose="02040503050406030204" pitchFamily="18" charset="0"/>
+                        </a:rPr>
+                        <m:t>−</m:t>
+                      </m:r>
+                      <m:r>
+                        <a:rPr lang="en-US" sz="3200" i="1">
+                          <a:latin typeface="Cambria Math" panose="02040503050406030204" pitchFamily="18" charset="0"/>
+                        </a:rPr>
+                        <m:t>𝑎</m:t>
+                      </m:r>
+                      <m:sSup>
+                        <m:sSupPr>
+                          <m:ctrlPr>
+                            <a:rPr lang="en-US" sz="3200" i="1">
+                              <a:latin typeface="Cambria Math" panose="02040503050406030204" pitchFamily="18" charset="0"/>
+                            </a:rPr>
+                          </m:ctrlPr>
+                        </m:sSupPr>
+                        <m:e>
+                          <m:r>
+                            <a:rPr lang="en-US" sz="3200" i="1">
+                              <a:latin typeface="Cambria Math" panose="02040503050406030204" pitchFamily="18" charset="0"/>
+                            </a:rPr>
+                            <m:t>𝑋</m:t>
+                          </m:r>
+                        </m:e>
+                        <m:sup>
+                          <m:r>
+                            <a:rPr lang="en-US" sz="3200" i="1">
+                              <a:latin typeface="Cambria Math" panose="02040503050406030204" pitchFamily="18" charset="0"/>
+                            </a:rPr>
+                            <m:t>𝑇</m:t>
+                          </m:r>
+                        </m:sup>
+                      </m:sSup>
+                      <m:r>
+                        <a:rPr lang="en-US" sz="3200" i="1">
+                          <a:latin typeface="Cambria Math" panose="02040503050406030204" pitchFamily="18" charset="0"/>
+                        </a:rPr>
+                        <m:t>(</m:t>
+                      </m:r>
+                      <m:acc>
+                        <m:accPr>
+                          <m:chr m:val="̂"/>
+                          <m:ctrlPr>
+                            <a:rPr lang="en-US" sz="3200" i="1">
+                              <a:latin typeface="Cambria Math" panose="02040503050406030204" pitchFamily="18" charset="0"/>
+                            </a:rPr>
+                          </m:ctrlPr>
+                        </m:accPr>
+                        <m:e>
+                          <m:r>
+                            <a:rPr lang="en-US" sz="3200" i="1">
+                              <a:latin typeface="Cambria Math" panose="02040503050406030204" pitchFamily="18" charset="0"/>
+                            </a:rPr>
+                            <m:t>𝑦</m:t>
+                          </m:r>
+                        </m:e>
+                      </m:acc>
+                      <m:r>
+                        <a:rPr lang="en-US" sz="3200" i="1">
+                          <a:latin typeface="Cambria Math" panose="02040503050406030204" pitchFamily="18" charset="0"/>
+                        </a:rPr>
+                        <m:t>−</m:t>
+                      </m:r>
+                      <m:r>
+                        <a:rPr lang="en-US" sz="3200" i="1">
+                          <a:latin typeface="Cambria Math" panose="02040503050406030204" pitchFamily="18" charset="0"/>
+                        </a:rPr>
+                        <m:t>𝑦</m:t>
+                      </m:r>
+                      <m:r>
+                        <a:rPr lang="en-US" sz="3200" i="1">
+                          <a:latin typeface="Cambria Math" panose="02040503050406030204" pitchFamily="18" charset="0"/>
+                        </a:rPr>
+                        <m:t>)</m:t>
+                      </m:r>
+                    </m:oMath>
+                  </m:oMathPara>
+                </a14:m>
+                <a:endParaRPr lang="ru-RU" sz="3200" dirty="0"/>
+              </a:p>
+            </p:txBody>
+          </p:sp>
+        </mc:Choice>
+        <mc:Fallback>
+          <p:sp>
+            <p:nvSpPr>
+              <p:cNvPr id="6" name="TextBox 5"/>
+              <p:cNvSpPr txBox="1">
+                <a:spLocks noRot="1" noChangeAspect="1" noMove="1" noResize="1" noEditPoints="1" noAdjustHandles="1" noChangeArrowheads="1" noChangeShapeType="1" noTextEdit="1"/>
+              </p:cNvSpPr>
+              <p:nvPr/>
+            </p:nvSpPr>
+            <p:spPr>
+              <a:xfrm>
+                <a:off x="2539014" y="1866044"/>
+                <a:ext cx="7297444" cy="584775"/>
+              </a:xfrm>
+              <a:prstGeom prst="rect">
+                <a:avLst/>
+              </a:prstGeom>
+              <a:blipFill>
+                <a:blip r:embed="rId3"/>
+                <a:stretch>
+                  <a:fillRect/>
+                </a:stretch>
+              </a:blipFill>
+            </p:spPr>
+            <p:txBody>
+              <a:bodyPr/>
+              <a:lstStyle/>
+              <a:p>
+                <a:r>
+                  <a:rPr lang="ru-RU">
+                    <a:noFill/>
+                  </a:rPr>
+                  <a:t> </a:t>
+                </a:r>
+              </a:p>
+            </p:txBody>
+          </p:sp>
+        </mc:Fallback>
+      </mc:AlternateContent>
+      <mc:AlternateContent xmlns:mc="http://schemas.openxmlformats.org/markup-compatibility/2006">
+        <mc:Choice xmlns:a14="http://schemas.microsoft.com/office/drawing/2010/main" Requires="a14">
+          <p:sp>
+            <p:nvSpPr>
+              <p:cNvPr id="8" name="TextBox 7"/>
+              <p:cNvSpPr txBox="1"/>
+              <p:nvPr/>
+            </p:nvSpPr>
+            <p:spPr>
+              <a:xfrm>
+                <a:off x="2539014" y="2891358"/>
+                <a:ext cx="7297444" cy="1284839"/>
+              </a:xfrm>
+              <a:prstGeom prst="rect">
+                <a:avLst/>
+              </a:prstGeom>
+              <a:noFill/>
+            </p:spPr>
+            <p:txBody>
+              <a:bodyPr wrap="square" rtlCol="0">
+                <a:spAutoFit/>
+              </a:bodyPr>
+              <a:lstStyle/>
+              <a:p>
+                <a:pPr/>
+                <a14:m>
+                  <m:oMathPara xmlns:m="http://schemas.openxmlformats.org/officeDocument/2006/math">
+                    <m:oMathParaPr>
+                      <m:jc m:val="centerGroup"/>
+                    </m:oMathParaPr>
+                    <m:oMath xmlns:m="http://schemas.openxmlformats.org/officeDocument/2006/math">
+                      <m:r>
+                        <a:rPr lang="en-US" sz="3200" b="0" i="1" smtClean="0">
+                          <a:latin typeface="Cambria Math" panose="02040503050406030204" pitchFamily="18" charset="0"/>
+                        </a:rPr>
+                        <m:t>𝑏</m:t>
+                      </m:r>
+                      <m:r>
+                        <a:rPr lang="en-US" sz="3200" i="1" smtClean="0">
+                          <a:latin typeface="Cambria Math" panose="02040503050406030204" pitchFamily="18" charset="0"/>
+                        </a:rPr>
+                        <m:t>=</m:t>
+                      </m:r>
+                      <m:r>
+                        <a:rPr lang="en-US" sz="3200" b="0" i="1" smtClean="0">
+                          <a:latin typeface="Cambria Math" panose="02040503050406030204" pitchFamily="18" charset="0"/>
+                        </a:rPr>
+                        <m:t>𝑏</m:t>
+                      </m:r>
+                      <m:r>
+                        <a:rPr lang="en-US" sz="3200" i="1">
+                          <a:latin typeface="Cambria Math" panose="02040503050406030204" pitchFamily="18" charset="0"/>
+                        </a:rPr>
+                        <m:t>−</m:t>
+                      </m:r>
+                      <m:r>
+                        <a:rPr lang="en-US" sz="3200" i="1">
+                          <a:latin typeface="Cambria Math" panose="02040503050406030204" pitchFamily="18" charset="0"/>
+                        </a:rPr>
+                        <m:t>𝑎</m:t>
+                      </m:r>
+                      <m:nary>
+                        <m:naryPr>
+                          <m:chr m:val="∑"/>
+                          <m:subHide m:val="on"/>
+                          <m:supHide m:val="on"/>
+                          <m:ctrlPr>
+                            <a:rPr lang="en-US" sz="3200" i="1" smtClean="0">
+                              <a:latin typeface="Cambria Math" panose="02040503050406030204" pitchFamily="18" charset="0"/>
+                            </a:rPr>
+                          </m:ctrlPr>
+                        </m:naryPr>
+                        <m:sub/>
+                        <m:sup/>
+                        <m:e>
+                          <m:r>
+                            <a:rPr lang="en-US" sz="3200" i="1">
+                              <a:latin typeface="Cambria Math" panose="02040503050406030204" pitchFamily="18" charset="0"/>
+                            </a:rPr>
+                            <m:t>(</m:t>
+                          </m:r>
+                          <m:acc>
+                            <m:accPr>
+                              <m:chr m:val="̂"/>
+                              <m:ctrlPr>
+                                <a:rPr lang="en-US" sz="3200" i="1">
+                                  <a:latin typeface="Cambria Math" panose="02040503050406030204" pitchFamily="18" charset="0"/>
+                                </a:rPr>
+                              </m:ctrlPr>
+                            </m:accPr>
+                            <m:e>
+                              <m:r>
+                                <a:rPr lang="en-US" sz="3200" i="1">
+                                  <a:latin typeface="Cambria Math" panose="02040503050406030204" pitchFamily="18" charset="0"/>
+                                </a:rPr>
+                                <m:t>𝑦</m:t>
+                              </m:r>
+                            </m:e>
+                          </m:acc>
+                          <m:r>
+                            <a:rPr lang="en-US" sz="3200" i="1">
+                              <a:latin typeface="Cambria Math" panose="02040503050406030204" pitchFamily="18" charset="0"/>
+                            </a:rPr>
+                            <m:t>−</m:t>
+                          </m:r>
+                          <m:r>
+                            <a:rPr lang="en-US" sz="3200" i="1">
+                              <a:latin typeface="Cambria Math" panose="02040503050406030204" pitchFamily="18" charset="0"/>
+                            </a:rPr>
+                            <m:t>𝑦</m:t>
+                          </m:r>
+                          <m:r>
+                            <a:rPr lang="en-US" sz="3200" i="1">
+                              <a:latin typeface="Cambria Math" panose="02040503050406030204" pitchFamily="18" charset="0"/>
+                            </a:rPr>
+                            <m:t>)</m:t>
+                          </m:r>
+                          <m:r>
+                            <m:rPr>
+                              <m:nor/>
+                            </m:rPr>
+                            <a:rPr lang="ru-RU" sz="3200" dirty="0"/>
+                            <m:t> </m:t>
+                          </m:r>
+                        </m:e>
+                      </m:nary>
+                    </m:oMath>
+                  </m:oMathPara>
+                </a14:m>
+                <a:endParaRPr lang="ru-RU" sz="3200" dirty="0"/>
+              </a:p>
+            </p:txBody>
+          </p:sp>
+        </mc:Choice>
+        <mc:Fallback>
+          <p:sp>
+            <p:nvSpPr>
+              <p:cNvPr id="8" name="TextBox 7"/>
+              <p:cNvSpPr txBox="1">
+                <a:spLocks noRot="1" noChangeAspect="1" noMove="1" noResize="1" noEditPoints="1" noAdjustHandles="1" noChangeArrowheads="1" noChangeShapeType="1" noTextEdit="1"/>
+              </p:cNvSpPr>
+              <p:nvPr/>
+            </p:nvSpPr>
+            <p:spPr>
+              <a:xfrm>
+                <a:off x="2539014" y="2891358"/>
+                <a:ext cx="7297444" cy="1284839"/>
+              </a:xfrm>
+              <a:prstGeom prst="rect">
+                <a:avLst/>
+              </a:prstGeom>
+              <a:blipFill>
+                <a:blip r:embed="rId4"/>
+                <a:stretch>
+                  <a:fillRect/>
+                </a:stretch>
+              </a:blipFill>
+            </p:spPr>
+            <p:txBody>
+              <a:bodyPr/>
+              <a:lstStyle/>
+              <a:p>
+                <a:r>
+                  <a:rPr lang="ru-RU">
+                    <a:noFill/>
+                  </a:rPr>
+                  <a:t> </a:t>
+                </a:r>
+              </a:p>
+            </p:txBody>
+          </p:sp>
+        </mc:Fallback>
+      </mc:AlternateContent>
+    </p:spTree>
+    <p:extLst>
+      <p:ext uri="{BB962C8B-B14F-4D97-AF65-F5344CB8AC3E}">
+        <p14:creationId xmlns:p14="http://schemas.microsoft.com/office/powerpoint/2010/main" val="3870628688"/>
+      </p:ext>
+    </p:extLst>
+  </p:cSld>
+  <p:clrMapOvr>
+    <a:masterClrMapping/>
+  </p:clrMapOvr>
+</p:sld>
+</file>
+
+<file path=ppt/slides/slide12.xml><?xml version="1.0" encoding="utf-8"?>
+<p:sld xmlns:a="http://schemas.openxmlformats.org/drawingml/2006/main" xmlns:r="http://schemas.openxmlformats.org/officeDocument/2006/relationships" xmlns:p="http://schemas.openxmlformats.org/presentationml/2006/main">
+  <p:cSld>
+    <p:spTree>
+      <p:nvGrpSpPr>
+        <p:cNvPr id="1" name=""/>
+        <p:cNvGrpSpPr/>
+        <p:nvPr/>
+      </p:nvGrpSpPr>
+      <p:grpSpPr>
+        <a:xfrm>
+          <a:off x="0" y="0"/>
+          <a:ext cx="0" cy="0"/>
+          <a:chOff x="0" y="0"/>
+          <a:chExt cx="0" cy="0"/>
+        </a:xfrm>
+      </p:grpSpPr>
       <p:pic>
         <p:nvPicPr>
-          <p:cNvPr id="1026" name="Picture 2" descr="Sigmoid Function - GeeksforGeeks"/>
+          <p:cNvPr id="4" name="Picture 2" descr="Sigmoid Function - GeeksforGeeks"/>
           <p:cNvPicPr>
             <a:picLocks noChangeAspect="1" noChangeArrowheads="1"/>
           </p:cNvPicPr>
           <p:nvPr/>
         </p:nvPicPr>
         <p:blipFill>
-          <a:blip r:embed="rId3">
+          <a:blip r:embed="rId2">
             <a:extLst>
               <a:ext uri="{28A0092B-C50C-407E-A947-70E740481C1C}">
                 <a14:useLocalDpi xmlns:a14="http://schemas.microsoft.com/office/drawing/2010/main" val="0"/>
@@ -3695,8 +4074,8 @@
         </p:blipFill>
         <p:spPr bwMode="auto">
           <a:xfrm>
-            <a:off x="2403946" y="2300606"/>
-            <a:ext cx="6724624" cy="4352154"/>
+            <a:off x="532661" y="0"/>
+            <a:ext cx="10608816" cy="6865989"/>
           </a:xfrm>
           <a:prstGeom prst="rect">
             <a:avLst/>
@@ -3716,7 +4095,7 @@
     </p:spTree>
     <p:extLst>
       <p:ext uri="{BB962C8B-B14F-4D97-AF65-F5344CB8AC3E}">
-        <p14:creationId xmlns:p14="http://schemas.microsoft.com/office/powerpoint/2010/main" val="3870628688"/>
+        <p14:creationId xmlns:p14="http://schemas.microsoft.com/office/powerpoint/2010/main" val="1030710170"/>
       </p:ext>
     </p:extLst>
   </p:cSld>
@@ -3726,7 +4105,7 @@
 </p:sld>
 </file>
 
-<file path=ppt/slides/slide12.xml><?xml version="1.0" encoding="utf-8"?>
+<file path=ppt/slides/slide13.xml><?xml version="1.0" encoding="utf-8"?>
 <p:sld xmlns:a="http://schemas.openxmlformats.org/drawingml/2006/main" xmlns:r="http://schemas.openxmlformats.org/officeDocument/2006/relationships" xmlns:p="http://schemas.openxmlformats.org/presentationml/2006/main">
   <p:cSld>
     <p:spTree>
@@ -3940,7 +4319,7 @@
 </p:sld>
 </file>
 
-<file path=ppt/slides/slide13.xml><?xml version="1.0" encoding="utf-8"?>
+<file path=ppt/slides/slide14.xml><?xml version="1.0" encoding="utf-8"?>
 <p:sld xmlns:a="http://schemas.openxmlformats.org/drawingml/2006/main" xmlns:r="http://schemas.openxmlformats.org/officeDocument/2006/relationships" xmlns:p="http://schemas.openxmlformats.org/presentationml/2006/main">
   <p:cSld>
     <p:spTree>
@@ -4184,7 +4563,7 @@
 </p:sld>
 </file>
 
-<file path=ppt/slides/slide14.xml><?xml version="1.0" encoding="utf-8"?>
+<file path=ppt/slides/slide15.xml><?xml version="1.0" encoding="utf-8"?>
 <p:sld xmlns:a="http://schemas.openxmlformats.org/drawingml/2006/main" xmlns:r="http://schemas.openxmlformats.org/officeDocument/2006/relationships" xmlns:p="http://schemas.openxmlformats.org/presentationml/2006/main">
   <p:cSld>
     <p:spTree>
@@ -4374,7 +4753,7 @@
 </p:sld>
 </file>
 
-<file path=ppt/slides/slide15.xml><?xml version="1.0" encoding="utf-8"?>
+<file path=ppt/slides/slide16.xml><?xml version="1.0" encoding="utf-8"?>
 <p:sld xmlns:a="http://schemas.openxmlformats.org/drawingml/2006/main" xmlns:r="http://schemas.openxmlformats.org/officeDocument/2006/relationships" xmlns:p="http://schemas.openxmlformats.org/presentationml/2006/main">
   <p:cSld>
     <p:spTree>
@@ -4403,7 +4782,7 @@
         </p:nvSpPr>
         <p:spPr>
           <a:xfrm>
-            <a:off x="838199" y="977684"/>
+            <a:off x="795512" y="675844"/>
             <a:ext cx="10515600" cy="1325563"/>
           </a:xfrm>
         </p:spPr>
@@ -4426,7 +4805,7 @@
       </p:sp>
       <p:pic>
         <p:nvPicPr>
-          <p:cNvPr id="7" name="Picture 6"/>
+          <p:cNvPr id="5" name="Picture 4"/>
           <p:cNvPicPr>
             <a:picLocks noChangeAspect="1"/>
           </p:cNvPicPr>
@@ -4440,8 +4819,8 @@
         </p:blipFill>
         <p:spPr>
           <a:xfrm>
-            <a:off x="294464" y="2769107"/>
-            <a:ext cx="11603069" cy="1781424"/>
+            <a:off x="148403" y="2710429"/>
+            <a:ext cx="11809818" cy="1577965"/>
           </a:xfrm>
           <a:prstGeom prst="rect">
             <a:avLst/>
@@ -4461,7 +4840,7 @@
 </p:sld>
 </file>
 
-<file path=ppt/slides/slide16.xml><?xml version="1.0" encoding="utf-8"?>
+<file path=ppt/slides/slide17.xml><?xml version="1.0" encoding="utf-8"?>
 <p:sld xmlns:a="http://schemas.openxmlformats.org/drawingml/2006/main" xmlns:r="http://schemas.openxmlformats.org/officeDocument/2006/relationships" xmlns:p="http://schemas.openxmlformats.org/presentationml/2006/main">
   <p:cSld>
     <p:spTree>

--- a/Tokosavorum_2.pptx
+++ b/Tokosavorum_2.pptx
@@ -17,11 +17,12 @@
     <p:sldId id="271" r:id="rId11"/>
     <p:sldId id="266" r:id="rId12"/>
     <p:sldId id="272" r:id="rId13"/>
-    <p:sldId id="267" r:id="rId14"/>
-    <p:sldId id="270" r:id="rId15"/>
-    <p:sldId id="265" r:id="rId16"/>
-    <p:sldId id="268" r:id="rId17"/>
-    <p:sldId id="263" r:id="rId18"/>
+    <p:sldId id="273" r:id="rId14"/>
+    <p:sldId id="267" r:id="rId15"/>
+    <p:sldId id="270" r:id="rId16"/>
+    <p:sldId id="265" r:id="rId17"/>
+    <p:sldId id="268" r:id="rId18"/>
+    <p:sldId id="263" r:id="rId19"/>
   </p:sldIdLst>
   <p:sldSz cx="12192000" cy="6858000"/>
   <p:notesSz cx="6858000" cy="9144000"/>
@@ -259,7 +260,7 @@
           <a:p>
             <a:fld id="{26B45A88-84CD-47B4-B068-1CCEBD78BFD4}" type="datetimeFigureOut">
               <a:rPr lang="ru-RU" smtClean="0"/>
-              <a:t>10.03.2026</a:t>
+              <a:t>11.03.2026</a:t>
             </a:fld>
             <a:endParaRPr lang="ru-RU"/>
           </a:p>
@@ -429,7 +430,7 @@
           <a:p>
             <a:fld id="{26B45A88-84CD-47B4-B068-1CCEBD78BFD4}" type="datetimeFigureOut">
               <a:rPr lang="ru-RU" smtClean="0"/>
-              <a:t>10.03.2026</a:t>
+              <a:t>11.03.2026</a:t>
             </a:fld>
             <a:endParaRPr lang="ru-RU"/>
           </a:p>
@@ -609,7 +610,7 @@
           <a:p>
             <a:fld id="{26B45A88-84CD-47B4-B068-1CCEBD78BFD4}" type="datetimeFigureOut">
               <a:rPr lang="ru-RU" smtClean="0"/>
-              <a:t>10.03.2026</a:t>
+              <a:t>11.03.2026</a:t>
             </a:fld>
             <a:endParaRPr lang="ru-RU"/>
           </a:p>
@@ -779,7 +780,7 @@
           <a:p>
             <a:fld id="{26B45A88-84CD-47B4-B068-1CCEBD78BFD4}" type="datetimeFigureOut">
               <a:rPr lang="ru-RU" smtClean="0"/>
-              <a:t>10.03.2026</a:t>
+              <a:t>11.03.2026</a:t>
             </a:fld>
             <a:endParaRPr lang="ru-RU"/>
           </a:p>
@@ -1025,7 +1026,7 @@
           <a:p>
             <a:fld id="{26B45A88-84CD-47B4-B068-1CCEBD78BFD4}" type="datetimeFigureOut">
               <a:rPr lang="ru-RU" smtClean="0"/>
-              <a:t>10.03.2026</a:t>
+              <a:t>11.03.2026</a:t>
             </a:fld>
             <a:endParaRPr lang="ru-RU"/>
           </a:p>
@@ -1257,7 +1258,7 @@
           <a:p>
             <a:fld id="{26B45A88-84CD-47B4-B068-1CCEBD78BFD4}" type="datetimeFigureOut">
               <a:rPr lang="ru-RU" smtClean="0"/>
-              <a:t>10.03.2026</a:t>
+              <a:t>11.03.2026</a:t>
             </a:fld>
             <a:endParaRPr lang="ru-RU"/>
           </a:p>
@@ -1624,7 +1625,7 @@
           <a:p>
             <a:fld id="{26B45A88-84CD-47B4-B068-1CCEBD78BFD4}" type="datetimeFigureOut">
               <a:rPr lang="ru-RU" smtClean="0"/>
-              <a:t>10.03.2026</a:t>
+              <a:t>11.03.2026</a:t>
             </a:fld>
             <a:endParaRPr lang="ru-RU"/>
           </a:p>
@@ -1742,7 +1743,7 @@
           <a:p>
             <a:fld id="{26B45A88-84CD-47B4-B068-1CCEBD78BFD4}" type="datetimeFigureOut">
               <a:rPr lang="ru-RU" smtClean="0"/>
-              <a:t>10.03.2026</a:t>
+              <a:t>11.03.2026</a:t>
             </a:fld>
             <a:endParaRPr lang="ru-RU"/>
           </a:p>
@@ -1837,7 +1838,7 @@
           <a:p>
             <a:fld id="{26B45A88-84CD-47B4-B068-1CCEBD78BFD4}" type="datetimeFigureOut">
               <a:rPr lang="ru-RU" smtClean="0"/>
-              <a:t>10.03.2026</a:t>
+              <a:t>11.03.2026</a:t>
             </a:fld>
             <a:endParaRPr lang="ru-RU"/>
           </a:p>
@@ -2114,7 +2115,7 @@
           <a:p>
             <a:fld id="{26B45A88-84CD-47B4-B068-1CCEBD78BFD4}" type="datetimeFigureOut">
               <a:rPr lang="ru-RU" smtClean="0"/>
-              <a:t>10.03.2026</a:t>
+              <a:t>11.03.2026</a:t>
             </a:fld>
             <a:endParaRPr lang="ru-RU"/>
           </a:p>
@@ -2367,7 +2368,7 @@
           <a:p>
             <a:fld id="{26B45A88-84CD-47B4-B068-1CCEBD78BFD4}" type="datetimeFigureOut">
               <a:rPr lang="ru-RU" smtClean="0"/>
-              <a:t>10.03.2026</a:t>
+              <a:t>11.03.2026</a:t>
             </a:fld>
             <a:endParaRPr lang="ru-RU"/>
           </a:p>
@@ -2580,7 +2581,7 @@
           <a:p>
             <a:fld id="{26B45A88-84CD-47B4-B068-1CCEBD78BFD4}" type="datetimeFigureOut">
               <a:rPr lang="ru-RU" smtClean="0"/>
-              <a:t>10.03.2026</a:t>
+              <a:t>11.03.2026</a:t>
             </a:fld>
             <a:endParaRPr lang="ru-RU"/>
           </a:p>
@@ -3335,8 +3336,8 @@
           </a:p>
         </p:txBody>
       </p:sp>
-      <mc:AlternateContent xmlns:mc="http://schemas.openxmlformats.org/markup-compatibility/2006">
-        <mc:Choice xmlns:a14="http://schemas.microsoft.com/office/drawing/2010/main" Requires="a14">
+      <mc:AlternateContent xmlns:mc="http://schemas.openxmlformats.org/markup-compatibility/2006" xmlns:a14="http://schemas.microsoft.com/office/drawing/2010/main">
+        <mc:Choice Requires="a14">
           <p:sp>
             <p:nvSpPr>
               <p:cNvPr id="3" name="Content Placeholder 2"/>
@@ -3635,7 +3636,7 @@
             </p:txBody>
           </p:sp>
         </mc:Choice>
-        <mc:Fallback>
+        <mc:Fallback xmlns="">
           <p:sp>
             <p:nvSpPr>
               <p:cNvPr id="3" name="Content Placeholder 2"/>
@@ -3673,8 +3674,8 @@
           </p:sp>
         </mc:Fallback>
       </mc:AlternateContent>
-      <mc:AlternateContent xmlns:mc="http://schemas.openxmlformats.org/markup-compatibility/2006">
-        <mc:Choice xmlns:a14="http://schemas.microsoft.com/office/drawing/2010/main" Requires="a14">
+      <mc:AlternateContent xmlns:mc="http://schemas.openxmlformats.org/markup-compatibility/2006" xmlns:a14="http://schemas.microsoft.com/office/drawing/2010/main">
+        <mc:Choice Requires="a14">
           <p:sp>
             <p:nvSpPr>
               <p:cNvPr id="6" name="TextBox 5"/>
@@ -3809,7 +3810,7 @@
             </p:txBody>
           </p:sp>
         </mc:Choice>
-        <mc:Fallback>
+        <mc:Fallback xmlns="">
           <p:sp>
             <p:nvSpPr>
               <p:cNvPr id="6" name="TextBox 5"/>
@@ -3848,8 +3849,8 @@
           </p:sp>
         </mc:Fallback>
       </mc:AlternateContent>
-      <mc:AlternateContent xmlns:mc="http://schemas.openxmlformats.org/markup-compatibility/2006">
-        <mc:Choice xmlns:a14="http://schemas.microsoft.com/office/drawing/2010/main" Requires="a14">
+      <mc:AlternateContent xmlns:mc="http://schemas.openxmlformats.org/markup-compatibility/2006" xmlns:a14="http://schemas.microsoft.com/office/drawing/2010/main">
+        <mc:Choice Requires="a14">
           <p:sp>
             <p:nvSpPr>
               <p:cNvPr id="8" name="TextBox 7"/>
@@ -3982,7 +3983,7 @@
             </p:txBody>
           </p:sp>
         </mc:Choice>
-        <mc:Fallback>
+        <mc:Fallback xmlns="">
           <p:sp>
             <p:nvSpPr>
               <p:cNvPr id="8" name="TextBox 7"/>
@@ -4106,6 +4107,66 @@
 </file>
 
 <file path=ppt/slides/slide13.xml><?xml version="1.0" encoding="utf-8"?>
+<p:sld xmlns:a="http://schemas.openxmlformats.org/drawingml/2006/main" xmlns:r="http://schemas.openxmlformats.org/officeDocument/2006/relationships" xmlns:p="http://schemas.openxmlformats.org/presentationml/2006/main">
+  <p:cSld>
+    <p:spTree>
+      <p:nvGrpSpPr>
+        <p:cNvPr id="1" name=""/>
+        <p:cNvGrpSpPr/>
+        <p:nvPr/>
+      </p:nvGrpSpPr>
+      <p:grpSpPr>
+        <a:xfrm>
+          <a:off x="0" y="0"/>
+          <a:ext cx="0" cy="0"/>
+          <a:chOff x="0" y="0"/>
+          <a:chExt cx="0" cy="0"/>
+        </a:xfrm>
+      </p:grpSpPr>
+      <p:pic>
+        <p:nvPicPr>
+          <p:cNvPr id="5" name="Picture 4"/>
+          <p:cNvPicPr>
+            <a:picLocks noChangeAspect="1"/>
+          </p:cNvPicPr>
+          <p:nvPr/>
+        </p:nvPicPr>
+        <p:blipFill>
+          <a:blip r:embed="rId2">
+            <a:extLst>
+              <a:ext uri="{28A0092B-C50C-407E-A947-70E740481C1C}">
+                <a14:useLocalDpi xmlns:a14="http://schemas.microsoft.com/office/drawing/2010/main" val="0"/>
+              </a:ext>
+            </a:extLst>
+          </a:blip>
+          <a:stretch>
+            <a:fillRect/>
+          </a:stretch>
+        </p:blipFill>
+        <p:spPr>
+          <a:xfrm>
+            <a:off x="1251750" y="0"/>
+            <a:ext cx="9144000" cy="6858000"/>
+          </a:xfrm>
+          <a:prstGeom prst="rect">
+            <a:avLst/>
+          </a:prstGeom>
+        </p:spPr>
+      </p:pic>
+    </p:spTree>
+    <p:extLst>
+      <p:ext uri="{BB962C8B-B14F-4D97-AF65-F5344CB8AC3E}">
+        <p14:creationId xmlns:p14="http://schemas.microsoft.com/office/powerpoint/2010/main" val="2752982984"/>
+      </p:ext>
+    </p:extLst>
+  </p:cSld>
+  <p:clrMapOvr>
+    <a:masterClrMapping/>
+  </p:clrMapOvr>
+</p:sld>
+</file>
+
+<file path=ppt/slides/slide14.xml><?xml version="1.0" encoding="utf-8"?>
 <p:sld xmlns:a="http://schemas.openxmlformats.org/drawingml/2006/main" xmlns:r="http://schemas.openxmlformats.org/officeDocument/2006/relationships" xmlns:p="http://schemas.openxmlformats.org/presentationml/2006/main">
   <p:cSld>
     <p:spTree>
@@ -4319,7 +4380,7 @@
 </p:sld>
 </file>
 
-<file path=ppt/slides/slide14.xml><?xml version="1.0" encoding="utf-8"?>
+<file path=ppt/slides/slide15.xml><?xml version="1.0" encoding="utf-8"?>
 <p:sld xmlns:a="http://schemas.openxmlformats.org/drawingml/2006/main" xmlns:r="http://schemas.openxmlformats.org/officeDocument/2006/relationships" xmlns:p="http://schemas.openxmlformats.org/presentationml/2006/main">
   <p:cSld>
     <p:spTree>
@@ -4563,7 +4624,7 @@
 </p:sld>
 </file>
 
-<file path=ppt/slides/slide15.xml><?xml version="1.0" encoding="utf-8"?>
+<file path=ppt/slides/slide16.xml><?xml version="1.0" encoding="utf-8"?>
 <p:sld xmlns:a="http://schemas.openxmlformats.org/drawingml/2006/main" xmlns:r="http://schemas.openxmlformats.org/officeDocument/2006/relationships" xmlns:p="http://schemas.openxmlformats.org/presentationml/2006/main">
   <p:cSld>
     <p:spTree>
@@ -4753,7 +4814,7 @@
 </p:sld>
 </file>
 
-<file path=ppt/slides/slide16.xml><?xml version="1.0" encoding="utf-8"?>
+<file path=ppt/slides/slide17.xml><?xml version="1.0" encoding="utf-8"?>
 <p:sld xmlns:a="http://schemas.openxmlformats.org/drawingml/2006/main" xmlns:r="http://schemas.openxmlformats.org/officeDocument/2006/relationships" xmlns:p="http://schemas.openxmlformats.org/presentationml/2006/main">
   <p:cSld>
     <p:spTree>
@@ -4805,7 +4866,7 @@
       </p:sp>
       <p:pic>
         <p:nvPicPr>
-          <p:cNvPr id="5" name="Picture 4"/>
+          <p:cNvPr id="3" name="Picture 2"/>
           <p:cNvPicPr>
             <a:picLocks noChangeAspect="1"/>
           </p:cNvPicPr>
@@ -4819,8 +4880,8 @@
         </p:blipFill>
         <p:spPr>
           <a:xfrm>
-            <a:off x="148403" y="2710429"/>
-            <a:ext cx="11809818" cy="1577965"/>
+            <a:off x="146670" y="2591554"/>
+            <a:ext cx="11813284" cy="1556790"/>
           </a:xfrm>
           <a:prstGeom prst="rect">
             <a:avLst/>
@@ -4840,7 +4901,7 @@
 </p:sld>
 </file>
 
-<file path=ppt/slides/slide17.xml><?xml version="1.0" encoding="utf-8"?>
+<file path=ppt/slides/slide18.xml><?xml version="1.0" encoding="utf-8"?>
 <p:sld xmlns:a="http://schemas.openxmlformats.org/drawingml/2006/main" xmlns:r="http://schemas.openxmlformats.org/officeDocument/2006/relationships" xmlns:p="http://schemas.openxmlformats.org/presentationml/2006/main">
   <p:cSld>
     <p:spTree>
